--- a/fidelity/fixtures/presentation-rich.pptx
+++ b/fidelity/fixtures/presentation-rich.pptx
@@ -1,12 +1,14 @@
 
 <file path=ppt/presentation.xml><?xml version="1.0" encoding="utf-8"?>
-<p:presentation xmlns:p="http://schemas.openxmlformats.org/presentationml/2006/main" xmlns:r="http://schemas.openxmlformats.org/officeDocument/2006/relationships">
+<p:presentation xmlns:a="http://schemas.openxmlformats.org/drawingml/2006/main" xmlns:r="http://schemas.openxmlformats.org/officeDocument/2006/relationships" xmlns:p="http://schemas.openxmlformats.org/presentationml/2006/main">
   <p:sldMasterIdLst>
-    <p:sldMasterId r:id="rIdMaster"/>
+    <p:sldMasterId id="2147483648" r:id="rIdMaster"/>
   </p:sldMasterIdLst>
   <p:sldIdLst>
     <p:sldId id="256" r:id="rId1"/>
   </p:sldIdLst>
+  <p:sldSz cx="12192000" cy="6858000"/>
+  <p:notesSz cx="6858000" cy="9144000"/>
 </p:presentation>
 </file>
 
@@ -25,82 +27,157 @@
 </file>
 
 <file path=ppt/notesSlides/notesSlide1.xml><?xml version="1.0" encoding="utf-8"?>
-<p:notes xmlns:p="http://schemas.openxmlformats.org/presentationml/2006/main">
+<p:notes xmlns:a="http://schemas.openxmlformats.org/drawingml/2006/main" xmlns:r="http://schemas.openxmlformats.org/officeDocument/2006/relationships" xmlns:p="http://schemas.openxmlformats.org/presentationml/2006/main">
   <p:cSld>
-    <p:spTree/>
+    <p:spTree>
+      <p:nvGrpSpPr>
+        <p:cNvPr id="1" name=""/>
+        <p:cNvGrpSpPr/>
+        <p:nvPr/>
+      </p:nvGrpSpPr>
+      <p:grpSpPr/>
+    </p:spTree>
   </p:cSld>
+  <p:clrMapOvr>
+    <a:masterClrMapping/>
+  </p:clrMapOvr>
 </p:notes>
 </file>
 
 <file path=ppt/slideLayouts/slideLayout1.xml><?xml version="1.0" encoding="utf-8"?>
-<p:sldLayout xmlns:p="http://schemas.openxmlformats.org/presentationml/2006/main">
-  <p:cSld/>
+<p:sldLayout xmlns:a="http://schemas.openxmlformats.org/drawingml/2006/main" xmlns:r="http://schemas.openxmlformats.org/officeDocument/2006/relationships" xmlns:p="http://schemas.openxmlformats.org/presentationml/2006/main" type="blank">
+  <p:cSld name="Blank">
+    <p:spTree>
+      <p:nvGrpSpPr>
+        <p:cNvPr id="1" name=""/>
+        <p:cNvGrpSpPr/>
+        <p:nvPr/>
+      </p:nvGrpSpPr>
+      <p:grpSpPr/>
+    </p:spTree>
+  </p:cSld>
 </p:sldLayout>
 </file>
 
 <file path=ppt/slideMasters/slideMaster1.xml><?xml version="1.0" encoding="utf-8"?>
-<p:sldMaster xmlns:p="http://schemas.openxmlformats.org/presentationml/2006/main">
-  <p:cSld/>
+<p:sldMaster xmlns:a="http://schemas.openxmlformats.org/drawingml/2006/main" xmlns:r="http://schemas.openxmlformats.org/officeDocument/2006/relationships" xmlns:p="http://schemas.openxmlformats.org/presentationml/2006/main">
+  <p:cSld>
+    <p:spTree>
+      <p:nvGrpSpPr>
+        <p:cNvPr id="1" name=""/>
+        <p:cNvGrpSpPr/>
+        <p:nvPr/>
+      </p:nvGrpSpPr>
+      <p:grpSpPr/>
+    </p:spTree>
+  </p:cSld>
+  <p:sldLayoutIdLst>
+    <p:sldLayoutId id="1" r:id="rIdLayout"/>
+  </p:sldLayoutIdLst>
+  <p:txStyles>
+    <p:titleStyle/>
+    <p:bodyStyle/>
+    <p:otherStyle/>
+  </p:txStyles>
 </p:sldMaster>
 </file>
 
 <file path=ppt/slides/slide1.xml><?xml version="1.0" encoding="utf-8"?>
-<p:sld xmlns:p="http://schemas.openxmlformats.org/presentationml/2006/main" xmlns:a="http://schemas.openxmlformats.org/drawingml/2006/main" xmlns:r="http://schemas.openxmlformats.org/officeDocument/2006/relationships">
+<p:sld xmlns:a="http://schemas.openxmlformats.org/drawingml/2006/main" xmlns:r="http://schemas.openxmlformats.org/officeDocument/2006/relationships" xmlns:p="http://schemas.openxmlformats.org/presentationml/2006/main">
   <p:cSld>
     <p:spTree>
+      <p:nvGrpSpPr>
+        <p:cNvPr id="1" name=""/>
+        <p:cNvGrpSpPr/>
+        <p:nvPr/>
+      </p:nvGrpSpPr>
+      <p:grpSpPr>
+        <a:xfrm>
+          <a:off x="0" y="0"/>
+          <a:ext cx="0" cy="0"/>
+          <a:chOff x="0" y="0"/>
+          <a:chExt cx="0" cy="0"/>
+        </a:xfrm>
+      </p:grpSpPr>
       <p:sp>
         <p:nvSpPr>
           <p:cNvPr id="2" name="Text Box"/>
+          <p:cNvSpPr txBox="1"/>
+          <p:nvPr/>
         </p:nvSpPr>
         <p:spPr>
-          <a:prstGeom prst="rect"/>
+          <a:xfrm>
+            <a:off x="400000" y="300000"/>
+            <a:ext cx="8000000" cy="600000"/>
+          </a:xfrm>
+          <a:prstGeom prst="rect">
+            <a:avLst/>
+          </a:prstGeom>
+          <a:noFill/>
         </p:spPr>
         <p:txBody>
+          <a:bodyPr/>
+          <a:lstStyle/>
           <a:p>
             <a:r>
+              <a:rPr lang="en-US"/>
               <a:t>Presentation Fidelity Text Box</a:t>
             </a:r>
+            <a:endParaRPr lang="en-US"/>
           </a:p>
         </p:txBody>
       </p:sp>
       <p:pic>
+        <p:nvPicPr>
+          <p:cNvPr id="3" name="image1.png"/>
+          <p:cNvPicPr/>
+          <p:nvPr/>
+        </p:nvPicPr>
         <p:blipFill>
           <a:blip r:embed="rIdImage"/>
+          <a:stretch>
+            <a:fillRect/>
+          </a:stretch>
         </p:blipFill>
+        <p:spPr>
+          <a:xfrm>
+            <a:off x="400000" y="1000000"/>
+            <a:ext cx="1000000" cy="1000000"/>
+          </a:xfrm>
+          <a:prstGeom prst="rect">
+            <a:avLst/>
+          </a:prstGeom>
+        </p:spPr>
       </p:pic>
-      <p:graphicFrame>
-        <a:graphic>
-          <a:graphicData>
-            <a:tbl>
-              <a:tr>
-                <a:tc>
-                  <a:txBody>
-                    <a:p>
-                      <a:r>
-                        <a:t>Table cell</a:t>
-                      </a:r>
-                    </a:p>
-                  </a:txBody>
-                </a:tc>
-              </a:tr>
-            </a:tbl>
-          </a:graphicData>
-        </a:graphic>
-      </p:graphicFrame>
-      <p:graphicFrame>
-        <a:graphic>
-          <a:graphicData uri="chart">
-            <c:chart xmlns:c="http://schemas.openxmlformats.org/drawingml/2006/chart" r:id="rIdChart"/>
-          </a:graphicData>
-        </a:graphic>
-      </p:graphicFrame>
-      <p:oleObj r:id="rIdOle"/>
     </p:spTree>
   </p:cSld>
-  <p:timing>
-    <p:tnLst>
-      <p:par/>
-    </p:tnLst>
-  </p:timing>
+  <p:clrMapOvr>
+    <a:masterClrMapping/>
+  </p:clrMapOvr>
 </p:sld>
+</file>
+
+<file path=ppt/theme/theme1.xml><?xml version="1.0" encoding="utf-8"?>
+<a:theme xmlns:a="http://schemas.openxmlformats.org/drawingml/2006/main" name="Office">
+  <a:themeElements>
+    <a:clrScheme name="Office">
+      <a:dk1>
+        <a:sysClr val="windowText" lastClr="000000"/>
+      </a:dk1>
+      <a:lt1>
+        <a:sysClr val="window" lastClr="FFFFFF"/>
+      </a:lt1>
+    </a:clrScheme>
+    <a:fontScheme name="Office">
+      <a:majorFont/>
+      <a:minorFont/>
+    </a:fontScheme>
+    <a:fmtScheme name="Office">
+      <a:fillStyleLst/>
+      <a:lnStyleLst/>
+      <a:effectStyleLst/>
+      <a:bgFillStyleLst/>
+    </a:fmtScheme>
+  </a:themeElements>
+</a:theme>
 </file>
--- a/fidelity/fixtures/presentation-rich.pptx
+++ b/fidelity/fixtures/presentation-rich.pptx
@@ -12,18 +12,8 @@
 </p:presentation>
 </file>
 
-<file path=ppt/charts/chart1.xml><?xml version="1.0" encoding="utf-8"?>
-<c:chartSpace xmlns:c="http://schemas.openxmlformats.org/drawingml/2006/chart">
-  <c:chart/>
-</c:chartSpace>
-</file>
-
 <file path=ppt/customXml/fidelity.xml><?xml version="1.0" encoding="utf-8"?>
 <fidelity>PPTX_OPAQUE_PART</fidelity>
-</file>
-
-<file path=ppt/diagrams/data1.xml><?xml version="1.0" encoding="utf-8"?>
-<dgm:dataModel xmlns:dgm="http://schemas.openxmlformats.org/drawingml/2006/diagram">SMARTART_DATA</dgm:dataModel>
 </file>
 
 <file path=ppt/notesSlides/notesSlide1.xml><?xml version="1.0" encoding="utf-8"?>
@@ -71,6 +61,7 @@
       <p:grpSpPr/>
     </p:spTree>
   </p:cSld>
+  <p:clrMap accent1="accent1" accent2="accent2" accent3="accent3" accent4="accent4" accent5="accent5" accent6="accent6" bg1="lt1" bg2="lt2" folHlink="folHlink" hlink="hlink" tx1="dk1" tx2="dk2"/>
   <p:sldLayoutIdLst>
     <p:sldLayoutId id="1" r:id="rIdLayout"/>
   </p:sldLayoutIdLst>

--- a/fidelity/fixtures/presentation-rich.pptx
+++ b/fidelity/fixtures/presentation-rich.pptx
@@ -61,7 +61,6 @@
       <p:grpSpPr/>
     </p:spTree>
   </p:cSld>
-  <p:clrMap accent1="accent1" accent2="accent2" accent3="accent3" accent4="accent4" accent5="accent5" accent6="accent6" bg1="lt1" bg2="lt2" folHlink="folHlink" hlink="hlink" tx1="dk1" tx2="dk2"/>
   <p:sldLayoutIdLst>
     <p:sldLayoutId id="1" r:id="rIdLayout"/>
   </p:sldLayoutIdLst>

--- a/fidelity/fixtures/presentation-rich.pptx
+++ b/fidelity/fixtures/presentation-rich.pptx
@@ -10,10 +10,6 @@
   <p:sldSz cx="12192000" cy="6858000"/>
   <p:notesSz cx="6858000" cy="9144000"/>
 </p:presentation>
-</file>
-
-<file path=ppt/customXml/fidelity.xml><?xml version="1.0" encoding="utf-8"?>
-<fidelity>PPTX_OPAQUE_PART</fidelity>
 </file>
 
 <file path=ppt/notesSlides/notesSlide1.xml><?xml version="1.0" encoding="utf-8"?>

--- a/fidelity/fixtures/presentation-rich.pptx
+++ b/fidelity/fixtures/presentation-rich.pptx
@@ -10,24 +10,6 @@
   <p:sldSz cx="12192000" cy="6858000"/>
   <p:notesSz cx="6858000" cy="9144000"/>
 </p:presentation>
-</file>
-
-<file path=ppt/notesSlides/notesSlide1.xml><?xml version="1.0" encoding="utf-8"?>
-<p:notes xmlns:a="http://schemas.openxmlformats.org/drawingml/2006/main" xmlns:r="http://schemas.openxmlformats.org/officeDocument/2006/relationships" xmlns:p="http://schemas.openxmlformats.org/presentationml/2006/main">
-  <p:cSld>
-    <p:spTree>
-      <p:nvGrpSpPr>
-        <p:cNvPr id="1" name=""/>
-        <p:cNvGrpSpPr/>
-        <p:nvPr/>
-      </p:nvGrpSpPr>
-      <p:grpSpPr/>
-    </p:spTree>
-  </p:cSld>
-  <p:clrMapOvr>
-    <a:masterClrMapping/>
-  </p:clrMapOvr>
-</p:notes>
 </file>
 
 <file path=ppt/slideLayouts/slideLayout1.xml><?xml version="1.0" encoding="utf-8"?>
@@ -57,6 +39,7 @@
       <p:grpSpPr/>
     </p:spTree>
   </p:cSld>
+  <p:clrMap bg1="lt1" tx1="dk1" bg2="lt2" tx2="dk2" accent1="accent1" accent2="accent2" accent3="accent3" accent4="accent4" accent5="accent5" accent6="accent6" hlink="hlink" folHlink="folHlink"/>
   <p:sldLayoutIdLst>
     <p:sldLayoutId id="1" r:id="rIdLayout"/>
   </p:sldLayoutIdLst>
@@ -153,16 +136,100 @@
       <a:lt1>
         <a:sysClr val="window" lastClr="FFFFFF"/>
       </a:lt1>
+      <a:dk2>
+        <a:srgbClr val="1F497D"/>
+      </a:dk2>
+      <a:lt2>
+        <a:srgbClr val="EEECE1"/>
+      </a:lt2>
+      <a:accent1>
+        <a:srgbClr val="4F81BD"/>
+      </a:accent1>
+      <a:accent2>
+        <a:srgbClr val="C0504D"/>
+      </a:accent2>
+      <a:accent3>
+        <a:srgbClr val="9BBB59"/>
+      </a:accent3>
+      <a:accent4>
+        <a:srgbClr val="8064A2"/>
+      </a:accent4>
+      <a:accent5>
+        <a:srgbClr val="4BACC6"/>
+      </a:accent5>
+      <a:accent6>
+        <a:srgbClr val="F79646"/>
+      </a:accent6>
+      <a:hlink>
+        <a:srgbClr val="0000FF"/>
+      </a:hlink>
+      <a:folHlink>
+        <a:srgbClr val="800080"/>
+      </a:folHlink>
     </a:clrScheme>
     <a:fontScheme name="Office">
-      <a:majorFont/>
-      <a:minorFont/>
+      <a:majorFont>
+        <a:latin typeface="Arial"/>
+        <a:ea typeface="Arial"/>
+        <a:cs typeface="Arial"/>
+      </a:majorFont>
+      <a:minorFont>
+        <a:latin typeface="Arial"/>
+        <a:ea typeface="Arial"/>
+        <a:cs typeface="Arial"/>
+      </a:minorFont>
     </a:fontScheme>
     <a:fmtScheme name="Office">
-      <a:fillStyleLst/>
-      <a:lnStyleLst/>
-      <a:effectStyleLst/>
-      <a:bgFillStyleLst/>
+      <a:fillStyleLst>
+        <a:solidFill>
+          <a:schemeClr val="phClr"/>
+        </a:solidFill>
+        <a:solidFill>
+          <a:schemeClr val="phClr"/>
+        </a:solidFill>
+        <a:solidFill>
+          <a:schemeClr val="phClr"/>
+        </a:solidFill>
+      </a:fillStyleLst>
+      <a:lnStyleLst>
+        <a:ln w="9525">
+          <a:solidFill>
+            <a:schemeClr val="phClr"/>
+          </a:solidFill>
+        </a:ln>
+        <a:ln w="9525">
+          <a:solidFill>
+            <a:schemeClr val="phClr"/>
+          </a:solidFill>
+        </a:ln>
+        <a:ln w="9525">
+          <a:solidFill>
+            <a:schemeClr val="phClr"/>
+          </a:solidFill>
+        </a:ln>
+      </a:lnStyleLst>
+      <a:effectStyleLst>
+        <a:effectStyle>
+          <a:effectLst/>
+        </a:effectStyle>
+        <a:effectStyle>
+          <a:effectLst/>
+        </a:effectStyle>
+        <a:effectStyle>
+          <a:effectLst/>
+        </a:effectStyle>
+      </a:effectStyleLst>
+      <a:bgFillStyleLst>
+        <a:solidFill>
+          <a:schemeClr val="phClr"/>
+        </a:solidFill>
+        <a:solidFill>
+          <a:schemeClr val="phClr"/>
+        </a:solidFill>
+        <a:solidFill>
+          <a:schemeClr val="phClr"/>
+        </a:solidFill>
+      </a:bgFillStyleLst>
     </a:fmtScheme>
   </a:themeElements>
 </a:theme>

--- a/fidelity/fixtures/presentation-rich.pptx
+++ b/fidelity/fixtures/presentation-rich.pptx
@@ -13,7 +13,7 @@
 </file>
 
 <file path=ppt/slideLayouts/slideLayout1.xml><?xml version="1.0" encoding="utf-8"?>
-<p:sldLayout xmlns:a="http://schemas.openxmlformats.org/drawingml/2006/main" xmlns:r="http://schemas.openxmlformats.org/officeDocument/2006/relationships" xmlns:p="http://schemas.openxmlformats.org/presentationml/2006/main" type="blank">
+<p:sldLayout xmlns:a="http://schemas.openxmlformats.org/drawingml/2006/main" xmlns:r="http://schemas.openxmlformats.org/officeDocument/2006/relationships" xmlns:p="http://schemas.openxmlformats.org/presentationml/2006/main" type="blank" preserve="1">
   <p:cSld name="Blank">
     <p:spTree>
       <p:nvGrpSpPr>
@@ -21,9 +21,19 @@
         <p:cNvGrpSpPr/>
         <p:nvPr/>
       </p:nvGrpSpPr>
-      <p:grpSpPr/>
+      <p:grpSpPr>
+        <a:xfrm>
+          <a:off x="0" y="0"/>
+          <a:ext cx="0" cy="0"/>
+          <a:chOff x="0" y="0"/>
+          <a:chExt cx="0" cy="0"/>
+        </a:xfrm>
+      </p:grpSpPr>
     </p:spTree>
   </p:cSld>
+  <p:clrMapOvr>
+    <a:masterClrMapping/>
+  </p:clrMapOvr>
 </p:sldLayout>
 </file>
 
@@ -41,7 +51,7 @@
   </p:cSld>
   <p:clrMap bg1="lt1" tx1="dk1" bg2="lt2" tx2="dk2" accent1="accent1" accent2="accent2" accent3="accent3" accent4="accent4" accent5="accent5" accent6="accent6" hlink="hlink" folHlink="folHlink"/>
   <p:sldLayoutIdLst>
-    <p:sldLayoutId id="1" r:id="rIdLayout"/>
+    <p:sldLayoutId id="2147483649" r:id="rIdLayout"/>
   </p:sldLayoutIdLst>
   <p:txStyles>
     <p:titleStyle/>
